--- a/Beat-The-Hazard-Presentation.pptx
+++ b/Beat-The-Hazard-Presentation.pptx
@@ -1839,7 +1839,7 @@
           <a:p>
             <a:r>
               <a:rPr lang="en-US" dirty="0"/>
-              <a:t>[7:30 – 8:30] Stress the gate: you cannot be tested on a site you have not been trained on — that mirrors a real site induction and clients recognise it immediately. The strip along the bottom is the Test Mode loop.</a:t>
+              <a:t>[7:30 – 8:30] Train Mode has no clock: an arrow, a distance and a named location lead the trainee to the nearest hazard, and a column of light marks the spot. It is optional — an experienced operative can go straight to Test Mode, which is five minutes with no guide and no locations. The strip along the bottom is the Test Mode loop.</a:t>
             </a:r>
             <a:endParaRPr lang="en-US" dirty="0"/>
           </a:p>
@@ -2926,7 +2926,7 @@
                 <a:ea typeface="Consolas" pitchFamily="34" charset="-122"/>
                 <a:cs typeface="Consolas" pitchFamily="34" charset="-120"/>
               </a:rPr>
-              <a:t>165</a:t>
+              <a:t>204</a:t>
             </a:r>
             <a:endParaRPr lang="en-US" sz="2000" dirty="0"/>
           </a:p>
@@ -7191,7 +7191,7 @@
                 <a:ea typeface="Calibri" pitchFamily="34" charset="-122"/>
                 <a:cs typeface="Calibri" pitchFamily="34" charset="-120"/>
               </a:rPr>
-              <a:t>Zero third-party assets. No downloaded models, stock textures, sound files or web fonts — which means no licences to track and nothing to attribute. It also keeps the whole game to one 716 kB file.</a:t>
+              <a:t>Zero third-party assets. No downloaded models, stock textures, sound files or web fonts — which means no licences to track and nothing to attribute. It also keeps the whole game to one 738 kB file.</a:t>
             </a:r>
             <a:endParaRPr lang="en-US" sz="1300" dirty="0"/>
           </a:p>
@@ -8432,7 +8432,7 @@
                 <a:ea typeface="Consolas" pitchFamily="34" charset="-122"/>
                 <a:cs typeface="Consolas" pitchFamily="34" charset="-120"/>
               </a:rPr>
-              <a:t>165</a:t>
+              <a:t>204</a:t>
             </a:r>
             <a:endParaRPr lang="en-US" sz="2000" dirty="0"/>
           </a:p>
@@ -11935,7 +11935,7 @@
                 <a:ea typeface="Calibri" pitchFamily="34" charset="-122"/>
                 <a:cs typeface="Calibri" pitchFamily="34" charset="-120"/>
               </a:rPr>
-              <a:t>Also ships as one 716 kB file that runs offline.</a:t>
+              <a:t>Also ships as one 738 kB file that runs offline.</a:t>
             </a:r>
             <a:endParaRPr lang="en-US" sz="1150" dirty="0"/>
           </a:p>
@@ -17887,7 +17887,7 @@
                 <a:ea typeface="Calibri" pitchFamily="34" charset="-122"/>
                 <a:cs typeface="Calibri" pitchFamily="34" charset="-120"/>
               </a:rPr>
-              <a:t>Teaches. It gates everything else.</a:t>
+              <a:t>Teaches. Optional — never a gate.</a:t>
             </a:r>
             <a:endParaRPr lang="en-US" sz="1250" dirty="0"/>
           </a:p>
@@ -17930,7 +17930,7 @@
                 <a:ea typeface="Calibri" pitchFamily="34" charset="-122"/>
                 <a:cs typeface="Calibri" pitchFamily="34" charset="-120"/>
               </a:rPr>
-              <a:t>Every hazard is ringed so it can be found</a:t>
+              <a:t>No clock at all — the trainee sets the pace</a:t>
             </a:r>
             <a:endParaRPr lang="en-US" sz="1250" dirty="0"/>
           </a:p>
@@ -17951,7 +17951,7 @@
                 <a:ea typeface="Calibri" pitchFamily="34" charset="-122"/>
                 <a:cs typeface="Calibri" pitchFamily="34" charset="-120"/>
               </a:rPr>
-              <a:t>Each find opens a card: what it is, why it is dangerous, the control</a:t>
+              <a:t>A guide arrow and distance point to the nearest hazard</a:t>
             </a:r>
             <a:endParaRPr lang="en-US" sz="1250" dirty="0"/>
           </a:p>
@@ -17972,7 +17972,7 @@
                 <a:ea typeface="Calibri" pitchFamily="34" charset="-122"/>
                 <a:cs typeface="Calibri" pitchFamily="34" charset="-120"/>
               </a:rPr>
-              <a:t>The location is named, so you know where to walk</a:t>
+              <a:t>Its location is named: “Aisle B, south end — at eye level”</a:t>
             </a:r>
             <a:endParaRPr lang="en-US" sz="1250" dirty="0"/>
           </a:p>
@@ -17993,7 +17993,7 @@
                 <a:ea typeface="Calibri" pitchFamily="34" charset="-122"/>
                 <a:cs typeface="Calibri" pitchFamily="34" charset="-120"/>
               </a:rPr>
-              <a:t>No time pressure — nothing is being scored</a:t>
+              <a:t>A column of light marks the spot, visible through racking</a:t>
             </a:r>
             <a:endParaRPr lang="en-US" sz="1250" dirty="0"/>
           </a:p>
@@ -18014,7 +18014,7 @@
                 <a:ea typeface="Calibri" pitchFamily="34" charset="-122"/>
                 <a:cs typeface="Calibri" pitchFamily="34" charset="-120"/>
               </a:rPr>
-              <a:t>Finishing a site unlocks testing there</a:t>
+              <a:t>Each find opens a card: what it is, why, and the control</a:t>
             </a:r>
             <a:endParaRPr lang="en-US" sz="1250" dirty="0"/>
           </a:p>
@@ -18182,7 +18182,7 @@
                 <a:ea typeface="Calibri" pitchFamily="34" charset="-122"/>
                 <a:cs typeface="Calibri" pitchFamily="34" charset="-120"/>
               </a:rPr>
-              <a:t>Evaluates. No help.</a:t>
+              <a:t>Evaluates. Open from the start.</a:t>
             </a:r>
             <a:endParaRPr lang="en-US" sz="1250" dirty="0"/>
           </a:p>
@@ -18225,7 +18225,7 @@
                 <a:ea typeface="Calibri" pitchFamily="34" charset="-122"/>
                 <a:cs typeface="Calibri" pitchFamily="34" charset="-120"/>
               </a:rPr>
-              <a:t>No rings, no hints — you find them by looking</a:t>
+              <a:t>Five minutes on the clock, whatever the difficulty</a:t>
             </a:r>
             <a:endParaRPr lang="en-US" sz="1250" dirty="0"/>
           </a:p>
@@ -18246,7 +18246,7 @@
                 <a:ea typeface="Calibri" pitchFamily="34" charset="-122"/>
                 <a:cs typeface="Calibri" pitchFamily="34" charset="-120"/>
               </a:rPr>
-              <a:t>A reaction clock runs on every hazard</a:t>
+              <a:t>No guide and no locations — you find them by looking</a:t>
             </a:r>
             <a:endParaRPr lang="en-US" sz="1250" dirty="0"/>
           </a:p>
@@ -19293,7 +19293,7 @@
                           <a:ea typeface="Calibri" pitchFamily="34" charset="-122"/>
                           <a:cs typeface="Calibri" pitchFamily="34" charset="-120"/>
                         </a:rPr>
-                        <a:t>Time per hazard</a:t>
+                        <a:t>Test length</a:t>
                       </a:r>
                       <a:endParaRPr lang="en-US" sz="1200" dirty="0">
                         <a:latin typeface="Calibri" charset="0"/>
@@ -19361,7 +19361,7 @@
                           <a:ea typeface="Calibri" pitchFamily="34" charset="-122"/>
                           <a:cs typeface="Calibri" pitchFamily="34" charset="-120"/>
                         </a:rPr>
-                        <a:t>90 s</a:t>
+                        <a:t>5:00</a:t>
                       </a:r>
                       <a:endParaRPr lang="en-US" sz="1200" dirty="0">
                         <a:latin typeface="Calibri" charset="0"/>
@@ -19429,7 +19429,7 @@
                           <a:ea typeface="Calibri" pitchFamily="34" charset="-122"/>
                           <a:cs typeface="Calibri" pitchFamily="34" charset="-120"/>
                         </a:rPr>
-                        <a:t>60 s</a:t>
+                        <a:t>5:00</a:t>
                       </a:r>
                       <a:endParaRPr lang="en-US" sz="1200" dirty="0">
                         <a:latin typeface="Calibri" charset="0"/>
@@ -19497,7 +19497,7 @@
                           <a:ea typeface="Calibri" pitchFamily="34" charset="-122"/>
                           <a:cs typeface="Calibri" pitchFamily="34" charset="-120"/>
                         </a:rPr>
-                        <a:t>38 s</a:t>
+                        <a:t>5:00</a:t>
                       </a:r>
                       <a:endParaRPr lang="en-US" sz="1200" dirty="0">
                         <a:latin typeface="Calibri" charset="0"/>
@@ -19567,7 +19567,7 @@
                           <a:ea typeface="Calibri" pitchFamily="34" charset="-122"/>
                           <a:cs typeface="Calibri" pitchFamily="34" charset="-120"/>
                         </a:rPr>
-                        <a:t>Score multiplier</a:t>
+                        <a:t>Fast bonus if found within</a:t>
                       </a:r>
                       <a:endParaRPr lang="en-US" sz="1200" dirty="0">
                         <a:latin typeface="Calibri" charset="0"/>
@@ -19635,7 +19635,7 @@
                           <a:ea typeface="Calibri" pitchFamily="34" charset="-122"/>
                           <a:cs typeface="Calibri" pitchFamily="34" charset="-120"/>
                         </a:rPr>
-                        <a:t>×1.0</a:t>
+                        <a:t>45 s</a:t>
                       </a:r>
                       <a:endParaRPr lang="en-US" sz="1200" dirty="0">
                         <a:latin typeface="Calibri" charset="0"/>
@@ -19703,7 +19703,7 @@
                           <a:ea typeface="Calibri" pitchFamily="34" charset="-122"/>
                           <a:cs typeface="Calibri" pitchFamily="34" charset="-120"/>
                         </a:rPr>
-                        <a:t>×1.25</a:t>
+                        <a:t>30 s</a:t>
                       </a:r>
                       <a:endParaRPr lang="en-US" sz="1200" dirty="0">
                         <a:latin typeface="Calibri" charset="0"/>
@@ -19771,7 +19771,7 @@
                           <a:ea typeface="Calibri" pitchFamily="34" charset="-122"/>
                           <a:cs typeface="Calibri" pitchFamily="34" charset="-120"/>
                         </a:rPr>
-                        <a:t>×1.6</a:t>
+                        <a:t>19 s</a:t>
                       </a:r>
                       <a:endParaRPr lang="en-US" sz="1200" dirty="0">
                         <a:latin typeface="Calibri" charset="0"/>
@@ -19841,7 +19841,555 @@
                           <a:ea typeface="Calibri" pitchFamily="34" charset="-122"/>
                           <a:cs typeface="Calibri" pitchFamily="34" charset="-120"/>
                         </a:rPr>
+                        <a:t>Score multiplier</a:t>
+                      </a:r>
+                      <a:endParaRPr lang="en-US" sz="1200" dirty="0">
+                        <a:latin typeface="Calibri" charset="0"/>
+                        <a:ea typeface="Calibri" charset="0"/>
+                        <a:cs typeface="Calibri" charset="0"/>
+                      </a:endParaRPr>
+                    </a:p>
+                  </a:txBody>
+                  <a:tcPr marL="91440" marR="91440" marT="45720" marB="45720" anchor="ctr">
+                    <a:lnL w="6350" cap="flat" cmpd="sng" algn="ctr">
+                      <a:solidFill>
+                        <a:srgbClr val="2A323B"/>
+                      </a:solidFill>
+                      <a:prstDash val="solid"/>
+                      <a:round/>
+                      <a:headEnd type="none" w="med" len="med"/>
+                      <a:tailEnd type="none" w="med" len="med"/>
+                    </a:lnL>
+                    <a:lnR w="6350" cap="flat" cmpd="sng" algn="ctr">
+                      <a:solidFill>
+                        <a:srgbClr val="2A323B"/>
+                      </a:solidFill>
+                      <a:prstDash val="solid"/>
+                      <a:round/>
+                      <a:headEnd type="none" w="med" len="med"/>
+                      <a:tailEnd type="none" w="med" len="med"/>
+                    </a:lnR>
+                    <a:lnT w="6350" cap="flat" cmpd="sng" algn="ctr">
+                      <a:solidFill>
+                        <a:srgbClr val="2A323B"/>
+                      </a:solidFill>
+                      <a:prstDash val="solid"/>
+                      <a:round/>
+                      <a:headEnd type="none" w="med" len="med"/>
+                      <a:tailEnd type="none" w="med" len="med"/>
+                    </a:lnT>
+                    <a:lnB w="6350" cap="flat" cmpd="sng" algn="ctr">
+                      <a:solidFill>
+                        <a:srgbClr val="2A323B"/>
+                      </a:solidFill>
+                      <a:prstDash val="solid"/>
+                      <a:round/>
+                      <a:headEnd type="none" w="med" len="med"/>
+                      <a:tailEnd type="none" w="med" len="med"/>
+                    </a:lnB>
+                    <a:solidFill>
+                      <a:srgbClr val="151C25"/>
+                    </a:solidFill>
+                  </a:tcPr>
+                </a:tc>
+                <a:tc>
+                  <a:txBody>
+                    <a:bodyPr/>
+                    <a:lstStyle/>
+                    <a:p>
+                      <a:pPr algn="ctr" indent="0" marL="0">
+                        <a:buNone/>
+                      </a:pPr>
+                      <a:r>
+                        <a:rPr lang="en-US" sz="1200" dirty="0">
+                          <a:solidFill>
+                            <a:srgbClr val="FFFFFF"/>
+                          </a:solidFill>
+                          <a:latin typeface="Calibri" pitchFamily="34" charset="0"/>
+                          <a:ea typeface="Calibri" pitchFamily="34" charset="-122"/>
+                          <a:cs typeface="Calibri" pitchFamily="34" charset="-120"/>
+                        </a:rPr>
+                        <a:t>×1.0</a:t>
+                      </a:r>
+                      <a:endParaRPr lang="en-US" sz="1200" dirty="0">
+                        <a:latin typeface="Calibri" charset="0"/>
+                        <a:ea typeface="Calibri" charset="0"/>
+                        <a:cs typeface="Calibri" charset="0"/>
+                      </a:endParaRPr>
+                    </a:p>
+                  </a:txBody>
+                  <a:tcPr marL="91440" marR="91440" marT="45720" marB="45720" anchor="ctr">
+                    <a:lnL w="6350" cap="flat" cmpd="sng" algn="ctr">
+                      <a:solidFill>
+                        <a:srgbClr val="2A323B"/>
+                      </a:solidFill>
+                      <a:prstDash val="solid"/>
+                      <a:round/>
+                      <a:headEnd type="none" w="med" len="med"/>
+                      <a:tailEnd type="none" w="med" len="med"/>
+                    </a:lnL>
+                    <a:lnR w="6350" cap="flat" cmpd="sng" algn="ctr">
+                      <a:solidFill>
+                        <a:srgbClr val="2A323B"/>
+                      </a:solidFill>
+                      <a:prstDash val="solid"/>
+                      <a:round/>
+                      <a:headEnd type="none" w="med" len="med"/>
+                      <a:tailEnd type="none" w="med" len="med"/>
+                    </a:lnR>
+                    <a:lnT w="6350" cap="flat" cmpd="sng" algn="ctr">
+                      <a:solidFill>
+                        <a:srgbClr val="2A323B"/>
+                      </a:solidFill>
+                      <a:prstDash val="solid"/>
+                      <a:round/>
+                      <a:headEnd type="none" w="med" len="med"/>
+                      <a:tailEnd type="none" w="med" len="med"/>
+                    </a:lnT>
+                    <a:lnB w="6350" cap="flat" cmpd="sng" algn="ctr">
+                      <a:solidFill>
+                        <a:srgbClr val="2A323B"/>
+                      </a:solidFill>
+                      <a:prstDash val="solid"/>
+                      <a:round/>
+                      <a:headEnd type="none" w="med" len="med"/>
+                      <a:tailEnd type="none" w="med" len="med"/>
+                    </a:lnB>
+                    <a:solidFill>
+                      <a:srgbClr val="151C25"/>
+                    </a:solidFill>
+                  </a:tcPr>
+                </a:tc>
+                <a:tc>
+                  <a:txBody>
+                    <a:bodyPr/>
+                    <a:lstStyle/>
+                    <a:p>
+                      <a:pPr algn="ctr" indent="0" marL="0">
+                        <a:buNone/>
+                      </a:pPr>
+                      <a:r>
+                        <a:rPr lang="en-US" sz="1200" dirty="0">
+                          <a:solidFill>
+                            <a:srgbClr val="FFFFFF"/>
+                          </a:solidFill>
+                          <a:latin typeface="Calibri" pitchFamily="34" charset="0"/>
+                          <a:ea typeface="Calibri" pitchFamily="34" charset="-122"/>
+                          <a:cs typeface="Calibri" pitchFamily="34" charset="-120"/>
+                        </a:rPr>
+                        <a:t>×1.25</a:t>
+                      </a:r>
+                      <a:endParaRPr lang="en-US" sz="1200" dirty="0">
+                        <a:latin typeface="Calibri" charset="0"/>
+                        <a:ea typeface="Calibri" charset="0"/>
+                        <a:cs typeface="Calibri" charset="0"/>
+                      </a:endParaRPr>
+                    </a:p>
+                  </a:txBody>
+                  <a:tcPr marL="91440" marR="91440" marT="45720" marB="45720" anchor="ctr">
+                    <a:lnL w="6350" cap="flat" cmpd="sng" algn="ctr">
+                      <a:solidFill>
+                        <a:srgbClr val="2A323B"/>
+                      </a:solidFill>
+                      <a:prstDash val="solid"/>
+                      <a:round/>
+                      <a:headEnd type="none" w="med" len="med"/>
+                      <a:tailEnd type="none" w="med" len="med"/>
+                    </a:lnL>
+                    <a:lnR w="6350" cap="flat" cmpd="sng" algn="ctr">
+                      <a:solidFill>
+                        <a:srgbClr val="2A323B"/>
+                      </a:solidFill>
+                      <a:prstDash val="solid"/>
+                      <a:round/>
+                      <a:headEnd type="none" w="med" len="med"/>
+                      <a:tailEnd type="none" w="med" len="med"/>
+                    </a:lnR>
+                    <a:lnT w="6350" cap="flat" cmpd="sng" algn="ctr">
+                      <a:solidFill>
+                        <a:srgbClr val="2A323B"/>
+                      </a:solidFill>
+                      <a:prstDash val="solid"/>
+                      <a:round/>
+                      <a:headEnd type="none" w="med" len="med"/>
+                      <a:tailEnd type="none" w="med" len="med"/>
+                    </a:lnT>
+                    <a:lnB w="6350" cap="flat" cmpd="sng" algn="ctr">
+                      <a:solidFill>
+                        <a:srgbClr val="2A323B"/>
+                      </a:solidFill>
+                      <a:prstDash val="solid"/>
+                      <a:round/>
+                      <a:headEnd type="none" w="med" len="med"/>
+                      <a:tailEnd type="none" w="med" len="med"/>
+                    </a:lnB>
+                    <a:solidFill>
+                      <a:srgbClr val="151C25"/>
+                    </a:solidFill>
+                  </a:tcPr>
+                </a:tc>
+                <a:tc>
+                  <a:txBody>
+                    <a:bodyPr/>
+                    <a:lstStyle/>
+                    <a:p>
+                      <a:pPr algn="ctr" indent="0" marL="0">
+                        <a:buNone/>
+                      </a:pPr>
+                      <a:r>
+                        <a:rPr lang="en-US" sz="1200" dirty="0">
+                          <a:solidFill>
+                            <a:srgbClr val="F2B90C"/>
+                          </a:solidFill>
+                          <a:latin typeface="Calibri" pitchFamily="34" charset="0"/>
+                          <a:ea typeface="Calibri" pitchFamily="34" charset="-122"/>
+                          <a:cs typeface="Calibri" pitchFamily="34" charset="-120"/>
+                        </a:rPr>
+                        <a:t>×1.6</a:t>
+                      </a:r>
+                      <a:endParaRPr lang="en-US" sz="1200" dirty="0">
+                        <a:latin typeface="Calibri" charset="0"/>
+                        <a:ea typeface="Calibri" charset="0"/>
+                        <a:cs typeface="Calibri" charset="0"/>
+                      </a:endParaRPr>
+                    </a:p>
+                  </a:txBody>
+                  <a:tcPr marL="91440" marR="91440" marT="45720" marB="45720" anchor="ctr">
+                    <a:lnL w="6350" cap="flat" cmpd="sng" algn="ctr">
+                      <a:solidFill>
+                        <a:srgbClr val="2A323B"/>
+                      </a:solidFill>
+                      <a:prstDash val="solid"/>
+                      <a:round/>
+                      <a:headEnd type="none" w="med" len="med"/>
+                      <a:tailEnd type="none" w="med" len="med"/>
+                    </a:lnL>
+                    <a:lnR w="6350" cap="flat" cmpd="sng" algn="ctr">
+                      <a:solidFill>
+                        <a:srgbClr val="2A323B"/>
+                      </a:solidFill>
+                      <a:prstDash val="solid"/>
+                      <a:round/>
+                      <a:headEnd type="none" w="med" len="med"/>
+                      <a:tailEnd type="none" w="med" len="med"/>
+                    </a:lnR>
+                    <a:lnT w="6350" cap="flat" cmpd="sng" algn="ctr">
+                      <a:solidFill>
+                        <a:srgbClr val="2A323B"/>
+                      </a:solidFill>
+                      <a:prstDash val="solid"/>
+                      <a:round/>
+                      <a:headEnd type="none" w="med" len="med"/>
+                      <a:tailEnd type="none" w="med" len="med"/>
+                    </a:lnT>
+                    <a:lnB w="6350" cap="flat" cmpd="sng" algn="ctr">
+                      <a:solidFill>
+                        <a:srgbClr val="2A323B"/>
+                      </a:solidFill>
+                      <a:prstDash val="solid"/>
+                      <a:round/>
+                      <a:headEnd type="none" w="med" len="med"/>
+                      <a:tailEnd type="none" w="med" len="med"/>
+                    </a:lnB>
+                    <a:solidFill>
+                      <a:srgbClr val="151C25"/>
+                    </a:solidFill>
+                  </a:tcPr>
+                </a:tc>
+              </a:tr>
+              <a:tr h="365760">
+                <a:tc>
+                  <a:txBody>
+                    <a:bodyPr/>
+                    <a:lstStyle/>
+                    <a:p>
+                      <a:pPr algn="l" indent="0" marL="0">
+                        <a:buNone/>
+                      </a:pPr>
+                      <a:r>
+                        <a:rPr lang="en-US" sz="1200" b="1" dirty="0">
+                          <a:solidFill>
+                            <a:srgbClr val="FFFFFF"/>
+                          </a:solidFill>
+                          <a:latin typeface="Calibri" pitchFamily="34" charset="0"/>
+                          <a:ea typeface="Calibri" pitchFamily="34" charset="-122"/>
+                          <a:cs typeface="Calibri" pitchFamily="34" charset="-120"/>
+                        </a:rPr>
                         <a:t>Hazards highlighted</a:t>
+                      </a:r>
+                      <a:endParaRPr lang="en-US" sz="1200" dirty="0">
+                        <a:latin typeface="Calibri" charset="0"/>
+                        <a:ea typeface="Calibri" charset="0"/>
+                        <a:cs typeface="Calibri" charset="0"/>
+                      </a:endParaRPr>
+                    </a:p>
+                  </a:txBody>
+                  <a:tcPr marL="91440" marR="91440" marT="45720" marB="45720" anchor="ctr">
+                    <a:lnL w="6350" cap="flat" cmpd="sng" algn="ctr">
+                      <a:solidFill>
+                        <a:srgbClr val="2A323B"/>
+                      </a:solidFill>
+                      <a:prstDash val="solid"/>
+                      <a:round/>
+                      <a:headEnd type="none" w="med" len="med"/>
+                      <a:tailEnd type="none" w="med" len="med"/>
+                    </a:lnL>
+                    <a:lnR w="6350" cap="flat" cmpd="sng" algn="ctr">
+                      <a:solidFill>
+                        <a:srgbClr val="2A323B"/>
+                      </a:solidFill>
+                      <a:prstDash val="solid"/>
+                      <a:round/>
+                      <a:headEnd type="none" w="med" len="med"/>
+                      <a:tailEnd type="none" w="med" len="med"/>
+                    </a:lnR>
+                    <a:lnT w="6350" cap="flat" cmpd="sng" algn="ctr">
+                      <a:solidFill>
+                        <a:srgbClr val="2A323B"/>
+                      </a:solidFill>
+                      <a:prstDash val="solid"/>
+                      <a:round/>
+                      <a:headEnd type="none" w="med" len="med"/>
+                      <a:tailEnd type="none" w="med" len="med"/>
+                    </a:lnT>
+                    <a:lnB w="6350" cap="flat" cmpd="sng" algn="ctr">
+                      <a:solidFill>
+                        <a:srgbClr val="2A323B"/>
+                      </a:solidFill>
+                      <a:prstDash val="solid"/>
+                      <a:round/>
+                      <a:headEnd type="none" w="med" len="med"/>
+                      <a:tailEnd type="none" w="med" len="med"/>
+                    </a:lnB>
+                    <a:solidFill>
+                      <a:srgbClr val="1B2530"/>
+                    </a:solidFill>
+                  </a:tcPr>
+                </a:tc>
+                <a:tc>
+                  <a:txBody>
+                    <a:bodyPr/>
+                    <a:lstStyle/>
+                    <a:p>
+                      <a:pPr algn="ctr" indent="0" marL="0">
+                        <a:buNone/>
+                      </a:pPr>
+                      <a:r>
+                        <a:rPr lang="en-US" sz="1200" dirty="0">
+                          <a:solidFill>
+                            <a:srgbClr val="FFFFFF"/>
+                          </a:solidFill>
+                          <a:latin typeface="Calibri" pitchFamily="34" charset="0"/>
+                          <a:ea typeface="Calibri" pitchFamily="34" charset="-122"/>
+                          <a:cs typeface="Calibri" pitchFamily="34" charset="-120"/>
+                        </a:rPr>
+                        <a:t>Yes</a:t>
+                      </a:r>
+                      <a:endParaRPr lang="en-US" sz="1200" dirty="0">
+                        <a:latin typeface="Calibri" charset="0"/>
+                        <a:ea typeface="Calibri" charset="0"/>
+                        <a:cs typeface="Calibri" charset="0"/>
+                      </a:endParaRPr>
+                    </a:p>
+                  </a:txBody>
+                  <a:tcPr marL="91440" marR="91440" marT="45720" marB="45720" anchor="ctr">
+                    <a:lnL w="6350" cap="flat" cmpd="sng" algn="ctr">
+                      <a:solidFill>
+                        <a:srgbClr val="2A323B"/>
+                      </a:solidFill>
+                      <a:prstDash val="solid"/>
+                      <a:round/>
+                      <a:headEnd type="none" w="med" len="med"/>
+                      <a:tailEnd type="none" w="med" len="med"/>
+                    </a:lnL>
+                    <a:lnR w="6350" cap="flat" cmpd="sng" algn="ctr">
+                      <a:solidFill>
+                        <a:srgbClr val="2A323B"/>
+                      </a:solidFill>
+                      <a:prstDash val="solid"/>
+                      <a:round/>
+                      <a:headEnd type="none" w="med" len="med"/>
+                      <a:tailEnd type="none" w="med" len="med"/>
+                    </a:lnR>
+                    <a:lnT w="6350" cap="flat" cmpd="sng" algn="ctr">
+                      <a:solidFill>
+                        <a:srgbClr val="2A323B"/>
+                      </a:solidFill>
+                      <a:prstDash val="solid"/>
+                      <a:round/>
+                      <a:headEnd type="none" w="med" len="med"/>
+                      <a:tailEnd type="none" w="med" len="med"/>
+                    </a:lnT>
+                    <a:lnB w="6350" cap="flat" cmpd="sng" algn="ctr">
+                      <a:solidFill>
+                        <a:srgbClr val="2A323B"/>
+                      </a:solidFill>
+                      <a:prstDash val="solid"/>
+                      <a:round/>
+                      <a:headEnd type="none" w="med" len="med"/>
+                      <a:tailEnd type="none" w="med" len="med"/>
+                    </a:lnB>
+                    <a:solidFill>
+                      <a:srgbClr val="1B2530"/>
+                    </a:solidFill>
+                  </a:tcPr>
+                </a:tc>
+                <a:tc>
+                  <a:txBody>
+                    <a:bodyPr/>
+                    <a:lstStyle/>
+                    <a:p>
+                      <a:pPr algn="ctr" indent="0" marL="0">
+                        <a:buNone/>
+                      </a:pPr>
+                      <a:r>
+                        <a:rPr lang="en-US" sz="1200" dirty="0">
+                          <a:solidFill>
+                            <a:srgbClr val="FFFFFF"/>
+                          </a:solidFill>
+                          <a:latin typeface="Calibri" pitchFamily="34" charset="0"/>
+                          <a:ea typeface="Calibri" pitchFamily="34" charset="-122"/>
+                          <a:cs typeface="Calibri" pitchFamily="34" charset="-120"/>
+                        </a:rPr>
+                        <a:t>No</a:t>
+                      </a:r>
+                      <a:endParaRPr lang="en-US" sz="1200" dirty="0">
+                        <a:latin typeface="Calibri" charset="0"/>
+                        <a:ea typeface="Calibri" charset="0"/>
+                        <a:cs typeface="Calibri" charset="0"/>
+                      </a:endParaRPr>
+                    </a:p>
+                  </a:txBody>
+                  <a:tcPr marL="91440" marR="91440" marT="45720" marB="45720" anchor="ctr">
+                    <a:lnL w="6350" cap="flat" cmpd="sng" algn="ctr">
+                      <a:solidFill>
+                        <a:srgbClr val="2A323B"/>
+                      </a:solidFill>
+                      <a:prstDash val="solid"/>
+                      <a:round/>
+                      <a:headEnd type="none" w="med" len="med"/>
+                      <a:tailEnd type="none" w="med" len="med"/>
+                    </a:lnL>
+                    <a:lnR w="6350" cap="flat" cmpd="sng" algn="ctr">
+                      <a:solidFill>
+                        <a:srgbClr val="2A323B"/>
+                      </a:solidFill>
+                      <a:prstDash val="solid"/>
+                      <a:round/>
+                      <a:headEnd type="none" w="med" len="med"/>
+                      <a:tailEnd type="none" w="med" len="med"/>
+                    </a:lnR>
+                    <a:lnT w="6350" cap="flat" cmpd="sng" algn="ctr">
+                      <a:solidFill>
+                        <a:srgbClr val="2A323B"/>
+                      </a:solidFill>
+                      <a:prstDash val="solid"/>
+                      <a:round/>
+                      <a:headEnd type="none" w="med" len="med"/>
+                      <a:tailEnd type="none" w="med" len="med"/>
+                    </a:lnT>
+                    <a:lnB w="6350" cap="flat" cmpd="sng" algn="ctr">
+                      <a:solidFill>
+                        <a:srgbClr val="2A323B"/>
+                      </a:solidFill>
+                      <a:prstDash val="solid"/>
+                      <a:round/>
+                      <a:headEnd type="none" w="med" len="med"/>
+                      <a:tailEnd type="none" w="med" len="med"/>
+                    </a:lnB>
+                    <a:solidFill>
+                      <a:srgbClr val="1B2530"/>
+                    </a:solidFill>
+                  </a:tcPr>
+                </a:tc>
+                <a:tc>
+                  <a:txBody>
+                    <a:bodyPr/>
+                    <a:lstStyle/>
+                    <a:p>
+                      <a:pPr algn="ctr" indent="0" marL="0">
+                        <a:buNone/>
+                      </a:pPr>
+                      <a:r>
+                        <a:rPr lang="en-US" sz="1200" dirty="0">
+                          <a:solidFill>
+                            <a:srgbClr val="F2B90C"/>
+                          </a:solidFill>
+                          <a:latin typeface="Calibri" pitchFamily="34" charset="0"/>
+                          <a:ea typeface="Calibri" pitchFamily="34" charset="-122"/>
+                          <a:cs typeface="Calibri" pitchFamily="34" charset="-120"/>
+                        </a:rPr>
+                        <a:t>No</a:t>
+                      </a:r>
+                      <a:endParaRPr lang="en-US" sz="1200" dirty="0">
+                        <a:latin typeface="Calibri" charset="0"/>
+                        <a:ea typeface="Calibri" charset="0"/>
+                        <a:cs typeface="Calibri" charset="0"/>
+                      </a:endParaRPr>
+                    </a:p>
+                  </a:txBody>
+                  <a:tcPr marL="91440" marR="91440" marT="45720" marB="45720" anchor="ctr">
+                    <a:lnL w="6350" cap="flat" cmpd="sng" algn="ctr">
+                      <a:solidFill>
+                        <a:srgbClr val="2A323B"/>
+                      </a:solidFill>
+                      <a:prstDash val="solid"/>
+                      <a:round/>
+                      <a:headEnd type="none" w="med" len="med"/>
+                      <a:tailEnd type="none" w="med" len="med"/>
+                    </a:lnL>
+                    <a:lnR w="6350" cap="flat" cmpd="sng" algn="ctr">
+                      <a:solidFill>
+                        <a:srgbClr val="2A323B"/>
+                      </a:solidFill>
+                      <a:prstDash val="solid"/>
+                      <a:round/>
+                      <a:headEnd type="none" w="med" len="med"/>
+                      <a:tailEnd type="none" w="med" len="med"/>
+                    </a:lnR>
+                    <a:lnT w="6350" cap="flat" cmpd="sng" algn="ctr">
+                      <a:solidFill>
+                        <a:srgbClr val="2A323B"/>
+                      </a:solidFill>
+                      <a:prstDash val="solid"/>
+                      <a:round/>
+                      <a:headEnd type="none" w="med" len="med"/>
+                      <a:tailEnd type="none" w="med" len="med"/>
+                    </a:lnT>
+                    <a:lnB w="6350" cap="flat" cmpd="sng" algn="ctr">
+                      <a:solidFill>
+                        <a:srgbClr val="2A323B"/>
+                      </a:solidFill>
+                      <a:prstDash val="solid"/>
+                      <a:round/>
+                      <a:headEnd type="none" w="med" len="med"/>
+                      <a:tailEnd type="none" w="med" len="med"/>
+                    </a:lnB>
+                    <a:solidFill>
+                      <a:srgbClr val="1B2530"/>
+                    </a:solidFill>
+                  </a:tcPr>
+                </a:tc>
+              </a:tr>
+              <a:tr h="365760">
+                <a:tc>
+                  <a:txBody>
+                    <a:bodyPr/>
+                    <a:lstStyle/>
+                    <a:p>
+                      <a:pPr algn="l" indent="0" marL="0">
+                        <a:buNone/>
+                      </a:pPr>
+                      <a:r>
+                        <a:rPr lang="en-US" sz="1200" b="1" dirty="0">
+                          <a:solidFill>
+                            <a:srgbClr val="FFFFFF"/>
+                          </a:solidFill>
+                          <a:latin typeface="Calibri" pitchFamily="34" charset="0"/>
+                          <a:ea typeface="Calibri" pitchFamily="34" charset="-122"/>
+                          <a:cs typeface="Calibri" pitchFamily="34" charset="-120"/>
+                        </a:rPr>
+                        <a:t>Hazard count shown</a:t>
                       </a:r>
                       <a:endParaRPr lang="en-US" sz="1200" dirty="0">
                         <a:latin typeface="Calibri" charset="0"/>
@@ -19977,7 +20525,7 @@
                           <a:ea typeface="Calibri" pitchFamily="34" charset="-122"/>
                           <a:cs typeface="Calibri" pitchFamily="34" charset="-120"/>
                         </a:rPr>
-                        <a:t>No</a:t>
+                        <a:t>Yes</a:t>
                       </a:r>
                       <a:endParaRPr lang="en-US" sz="1200" dirty="0">
                         <a:latin typeface="Calibri" charset="0"/>
@@ -20115,7 +20663,7 @@
                           <a:ea typeface="Calibri" pitchFamily="34" charset="-122"/>
                           <a:cs typeface="Calibri" pitchFamily="34" charset="-120"/>
                         </a:rPr>
-                        <a:t>Hazard count shown</a:t>
+                        <a:t>Decoys to reject</a:t>
                       </a:r>
                       <a:endParaRPr lang="en-US" sz="1200" dirty="0">
                         <a:latin typeface="Calibri" charset="0"/>
@@ -20183,7 +20731,7 @@
                           <a:ea typeface="Calibri" pitchFamily="34" charset="-122"/>
                           <a:cs typeface="Calibri" pitchFamily="34" charset="-120"/>
                         </a:rPr>
-                        <a:t>Yes</a:t>
+                        <a:t>0</a:t>
                       </a:r>
                       <a:endParaRPr lang="en-US" sz="1200" dirty="0">
                         <a:latin typeface="Calibri" charset="0"/>
@@ -20251,7 +20799,7 @@
                           <a:ea typeface="Calibri" pitchFamily="34" charset="-122"/>
                           <a:cs typeface="Calibri" pitchFamily="34" charset="-120"/>
                         </a:rPr>
-                        <a:t>Yes</a:t>
+                        <a:t>6</a:t>
                       </a:r>
                       <a:endParaRPr lang="en-US" sz="1200" dirty="0">
                         <a:latin typeface="Calibri" charset="0"/>
@@ -20319,7 +20867,7 @@
                           <a:ea typeface="Calibri" pitchFamily="34" charset="-122"/>
                           <a:cs typeface="Calibri" pitchFamily="34" charset="-120"/>
                         </a:rPr>
-                        <a:t>No</a:t>
+                        <a:t>12</a:t>
                       </a:r>
                       <a:endParaRPr lang="en-US" sz="1200" dirty="0">
                         <a:latin typeface="Calibri" charset="0"/>
@@ -20389,7 +20937,7 @@
                           <a:ea typeface="Calibri" pitchFamily="34" charset="-122"/>
                           <a:cs typeface="Calibri" pitchFamily="34" charset="-120"/>
                         </a:rPr>
-                        <a:t>Decoys to reject</a:t>
+                        <a:t>Moving hazards</a:t>
                       </a:r>
                       <a:endParaRPr lang="en-US" sz="1200" dirty="0">
                         <a:latin typeface="Calibri" charset="0"/>
@@ -20457,7 +21005,7 @@
                           <a:ea typeface="Calibri" pitchFamily="34" charset="-122"/>
                           <a:cs typeface="Calibri" pitchFamily="34" charset="-120"/>
                         </a:rPr>
-                        <a:t>0</a:t>
+                        <a:t>No</a:t>
                       </a:r>
                       <a:endParaRPr lang="en-US" sz="1200" dirty="0">
                         <a:latin typeface="Calibri" charset="0"/>
@@ -20525,7 +21073,7 @@
                           <a:ea typeface="Calibri" pitchFamily="34" charset="-122"/>
                           <a:cs typeface="Calibri" pitchFamily="34" charset="-120"/>
                         </a:rPr>
-                        <a:t>6</a:t>
+                        <a:t>Yes</a:t>
                       </a:r>
                       <a:endParaRPr lang="en-US" sz="1200" dirty="0">
                         <a:latin typeface="Calibri" charset="0"/>
@@ -20593,7 +21141,7 @@
                           <a:ea typeface="Calibri" pitchFamily="34" charset="-122"/>
                           <a:cs typeface="Calibri" pitchFamily="34" charset="-120"/>
                         </a:rPr>
-                        <a:t>12</a:t>
+                        <a:t>Yes</a:t>
                       </a:r>
                       <a:endParaRPr lang="en-US" sz="1200" dirty="0">
                         <a:latin typeface="Calibri" charset="0"/>
@@ -20663,7 +21211,7 @@
                           <a:ea typeface="Calibri" pitchFamily="34" charset="-122"/>
                           <a:cs typeface="Calibri" pitchFamily="34" charset="-120"/>
                         </a:rPr>
-                        <a:t>Moving hazards</a:t>
+                        <a:t>Ambient light</a:t>
                       </a:r>
                       <a:endParaRPr lang="en-US" sz="1200" dirty="0">
                         <a:latin typeface="Calibri" charset="0"/>
@@ -20731,7 +21279,7 @@
                           <a:ea typeface="Calibri" pitchFamily="34" charset="-122"/>
                           <a:cs typeface="Calibri" pitchFamily="34" charset="-120"/>
                         </a:rPr>
-                        <a:t>No</a:t>
+                        <a:t>0.85</a:t>
                       </a:r>
                       <a:endParaRPr lang="en-US" sz="1200" dirty="0">
                         <a:latin typeface="Calibri" charset="0"/>
@@ -20799,7 +21347,7 @@
                           <a:ea typeface="Calibri" pitchFamily="34" charset="-122"/>
                           <a:cs typeface="Calibri" pitchFamily="34" charset="-120"/>
                         </a:rPr>
-                        <a:t>Yes</a:t>
+                        <a:t>0.60</a:t>
                       </a:r>
                       <a:endParaRPr lang="en-US" sz="1200" dirty="0">
                         <a:latin typeface="Calibri" charset="0"/>
@@ -20867,7 +21415,7 @@
                           <a:ea typeface="Calibri" pitchFamily="34" charset="-122"/>
                           <a:cs typeface="Calibri" pitchFamily="34" charset="-120"/>
                         </a:rPr>
-                        <a:t>Yes</a:t>
+                        <a:t>0.40</a:t>
                       </a:r>
                       <a:endParaRPr lang="en-US" sz="1200" dirty="0">
                         <a:latin typeface="Calibri" charset="0"/>
@@ -20937,7 +21485,7 @@
                           <a:ea typeface="Calibri" pitchFamily="34" charset="-122"/>
                           <a:cs typeface="Calibri" pitchFamily="34" charset="-120"/>
                         </a:rPr>
-                        <a:t>Ambient light</a:t>
+                        <a:t>Aim tolerance</a:t>
                       </a:r>
                       <a:endParaRPr lang="en-US" sz="1200" dirty="0">
                         <a:latin typeface="Calibri" charset="0"/>
@@ -21005,7 +21553,7 @@
                           <a:ea typeface="Calibri" pitchFamily="34" charset="-122"/>
                           <a:cs typeface="Calibri" pitchFamily="34" charset="-120"/>
                         </a:rPr>
-                        <a:t>0.85</a:t>
+                        <a:t>1.35</a:t>
                       </a:r>
                       <a:endParaRPr lang="en-US" sz="1200" dirty="0">
                         <a:latin typeface="Calibri" charset="0"/>
@@ -21073,7 +21621,7 @@
                           <a:ea typeface="Calibri" pitchFamily="34" charset="-122"/>
                           <a:cs typeface="Calibri" pitchFamily="34" charset="-120"/>
                         </a:rPr>
-                        <a:t>0.60</a:t>
+                        <a:t>1.00</a:t>
                       </a:r>
                       <a:endParaRPr lang="en-US" sz="1200" dirty="0">
                         <a:latin typeface="Calibri" charset="0"/>
@@ -21141,7 +21689,7 @@
                           <a:ea typeface="Calibri" pitchFamily="34" charset="-122"/>
                           <a:cs typeface="Calibri" pitchFamily="34" charset="-120"/>
                         </a:rPr>
-                        <a:t>0.40</a:t>
+                        <a:t>0.80</a:t>
                       </a:r>
                       <a:endParaRPr lang="en-US" sz="1200" dirty="0">
                         <a:latin typeface="Calibri" charset="0"/>
@@ -21189,280 +21737,6 @@
                     </a:lnB>
                     <a:solidFill>
                       <a:srgbClr val="151C25"/>
-                    </a:solidFill>
-                  </a:tcPr>
-                </a:tc>
-              </a:tr>
-              <a:tr h="365760">
-                <a:tc>
-                  <a:txBody>
-                    <a:bodyPr/>
-                    <a:lstStyle/>
-                    <a:p>
-                      <a:pPr algn="l" indent="0" marL="0">
-                        <a:buNone/>
-                      </a:pPr>
-                      <a:r>
-                        <a:rPr lang="en-US" sz="1200" b="1" dirty="0">
-                          <a:solidFill>
-                            <a:srgbClr val="FFFFFF"/>
-                          </a:solidFill>
-                          <a:latin typeface="Calibri" pitchFamily="34" charset="0"/>
-                          <a:ea typeface="Calibri" pitchFamily="34" charset="-122"/>
-                          <a:cs typeface="Calibri" pitchFamily="34" charset="-120"/>
-                        </a:rPr>
-                        <a:t>Aim tolerance</a:t>
-                      </a:r>
-                      <a:endParaRPr lang="en-US" sz="1200" dirty="0">
-                        <a:latin typeface="Calibri" charset="0"/>
-                        <a:ea typeface="Calibri" charset="0"/>
-                        <a:cs typeface="Calibri" charset="0"/>
-                      </a:endParaRPr>
-                    </a:p>
-                  </a:txBody>
-                  <a:tcPr marL="91440" marR="91440" marT="45720" marB="45720" anchor="ctr">
-                    <a:lnL w="6350" cap="flat" cmpd="sng" algn="ctr">
-                      <a:solidFill>
-                        <a:srgbClr val="2A323B"/>
-                      </a:solidFill>
-                      <a:prstDash val="solid"/>
-                      <a:round/>
-                      <a:headEnd type="none" w="med" len="med"/>
-                      <a:tailEnd type="none" w="med" len="med"/>
-                    </a:lnL>
-                    <a:lnR w="6350" cap="flat" cmpd="sng" algn="ctr">
-                      <a:solidFill>
-                        <a:srgbClr val="2A323B"/>
-                      </a:solidFill>
-                      <a:prstDash val="solid"/>
-                      <a:round/>
-                      <a:headEnd type="none" w="med" len="med"/>
-                      <a:tailEnd type="none" w="med" len="med"/>
-                    </a:lnR>
-                    <a:lnT w="6350" cap="flat" cmpd="sng" algn="ctr">
-                      <a:solidFill>
-                        <a:srgbClr val="2A323B"/>
-                      </a:solidFill>
-                      <a:prstDash val="solid"/>
-                      <a:round/>
-                      <a:headEnd type="none" w="med" len="med"/>
-                      <a:tailEnd type="none" w="med" len="med"/>
-                    </a:lnT>
-                    <a:lnB w="6350" cap="flat" cmpd="sng" algn="ctr">
-                      <a:solidFill>
-                        <a:srgbClr val="2A323B"/>
-                      </a:solidFill>
-                      <a:prstDash val="solid"/>
-                      <a:round/>
-                      <a:headEnd type="none" w="med" len="med"/>
-                      <a:tailEnd type="none" w="med" len="med"/>
-                    </a:lnB>
-                    <a:solidFill>
-                      <a:srgbClr val="1B2530"/>
-                    </a:solidFill>
-                  </a:tcPr>
-                </a:tc>
-                <a:tc>
-                  <a:txBody>
-                    <a:bodyPr/>
-                    <a:lstStyle/>
-                    <a:p>
-                      <a:pPr algn="ctr" indent="0" marL="0">
-                        <a:buNone/>
-                      </a:pPr>
-                      <a:r>
-                        <a:rPr lang="en-US" sz="1200" dirty="0">
-                          <a:solidFill>
-                            <a:srgbClr val="FFFFFF"/>
-                          </a:solidFill>
-                          <a:latin typeface="Calibri" pitchFamily="34" charset="0"/>
-                          <a:ea typeface="Calibri" pitchFamily="34" charset="-122"/>
-                          <a:cs typeface="Calibri" pitchFamily="34" charset="-120"/>
-                        </a:rPr>
-                        <a:t>1.35</a:t>
-                      </a:r>
-                      <a:endParaRPr lang="en-US" sz="1200" dirty="0">
-                        <a:latin typeface="Calibri" charset="0"/>
-                        <a:ea typeface="Calibri" charset="0"/>
-                        <a:cs typeface="Calibri" charset="0"/>
-                      </a:endParaRPr>
-                    </a:p>
-                  </a:txBody>
-                  <a:tcPr marL="91440" marR="91440" marT="45720" marB="45720" anchor="ctr">
-                    <a:lnL w="6350" cap="flat" cmpd="sng" algn="ctr">
-                      <a:solidFill>
-                        <a:srgbClr val="2A323B"/>
-                      </a:solidFill>
-                      <a:prstDash val="solid"/>
-                      <a:round/>
-                      <a:headEnd type="none" w="med" len="med"/>
-                      <a:tailEnd type="none" w="med" len="med"/>
-                    </a:lnL>
-                    <a:lnR w="6350" cap="flat" cmpd="sng" algn="ctr">
-                      <a:solidFill>
-                        <a:srgbClr val="2A323B"/>
-                      </a:solidFill>
-                      <a:prstDash val="solid"/>
-                      <a:round/>
-                      <a:headEnd type="none" w="med" len="med"/>
-                      <a:tailEnd type="none" w="med" len="med"/>
-                    </a:lnR>
-                    <a:lnT w="6350" cap="flat" cmpd="sng" algn="ctr">
-                      <a:solidFill>
-                        <a:srgbClr val="2A323B"/>
-                      </a:solidFill>
-                      <a:prstDash val="solid"/>
-                      <a:round/>
-                      <a:headEnd type="none" w="med" len="med"/>
-                      <a:tailEnd type="none" w="med" len="med"/>
-                    </a:lnT>
-                    <a:lnB w="6350" cap="flat" cmpd="sng" algn="ctr">
-                      <a:solidFill>
-                        <a:srgbClr val="2A323B"/>
-                      </a:solidFill>
-                      <a:prstDash val="solid"/>
-                      <a:round/>
-                      <a:headEnd type="none" w="med" len="med"/>
-                      <a:tailEnd type="none" w="med" len="med"/>
-                    </a:lnB>
-                    <a:solidFill>
-                      <a:srgbClr val="1B2530"/>
-                    </a:solidFill>
-                  </a:tcPr>
-                </a:tc>
-                <a:tc>
-                  <a:txBody>
-                    <a:bodyPr/>
-                    <a:lstStyle/>
-                    <a:p>
-                      <a:pPr algn="ctr" indent="0" marL="0">
-                        <a:buNone/>
-                      </a:pPr>
-                      <a:r>
-                        <a:rPr lang="en-US" sz="1200" dirty="0">
-                          <a:solidFill>
-                            <a:srgbClr val="FFFFFF"/>
-                          </a:solidFill>
-                          <a:latin typeface="Calibri" pitchFamily="34" charset="0"/>
-                          <a:ea typeface="Calibri" pitchFamily="34" charset="-122"/>
-                          <a:cs typeface="Calibri" pitchFamily="34" charset="-120"/>
-                        </a:rPr>
-                        <a:t>1.00</a:t>
-                      </a:r>
-                      <a:endParaRPr lang="en-US" sz="1200" dirty="0">
-                        <a:latin typeface="Calibri" charset="0"/>
-                        <a:ea typeface="Calibri" charset="0"/>
-                        <a:cs typeface="Calibri" charset="0"/>
-                      </a:endParaRPr>
-                    </a:p>
-                  </a:txBody>
-                  <a:tcPr marL="91440" marR="91440" marT="45720" marB="45720" anchor="ctr">
-                    <a:lnL w="6350" cap="flat" cmpd="sng" algn="ctr">
-                      <a:solidFill>
-                        <a:srgbClr val="2A323B"/>
-                      </a:solidFill>
-                      <a:prstDash val="solid"/>
-                      <a:round/>
-                      <a:headEnd type="none" w="med" len="med"/>
-                      <a:tailEnd type="none" w="med" len="med"/>
-                    </a:lnL>
-                    <a:lnR w="6350" cap="flat" cmpd="sng" algn="ctr">
-                      <a:solidFill>
-                        <a:srgbClr val="2A323B"/>
-                      </a:solidFill>
-                      <a:prstDash val="solid"/>
-                      <a:round/>
-                      <a:headEnd type="none" w="med" len="med"/>
-                      <a:tailEnd type="none" w="med" len="med"/>
-                    </a:lnR>
-                    <a:lnT w="6350" cap="flat" cmpd="sng" algn="ctr">
-                      <a:solidFill>
-                        <a:srgbClr val="2A323B"/>
-                      </a:solidFill>
-                      <a:prstDash val="solid"/>
-                      <a:round/>
-                      <a:headEnd type="none" w="med" len="med"/>
-                      <a:tailEnd type="none" w="med" len="med"/>
-                    </a:lnT>
-                    <a:lnB w="6350" cap="flat" cmpd="sng" algn="ctr">
-                      <a:solidFill>
-                        <a:srgbClr val="2A323B"/>
-                      </a:solidFill>
-                      <a:prstDash val="solid"/>
-                      <a:round/>
-                      <a:headEnd type="none" w="med" len="med"/>
-                      <a:tailEnd type="none" w="med" len="med"/>
-                    </a:lnB>
-                    <a:solidFill>
-                      <a:srgbClr val="1B2530"/>
-                    </a:solidFill>
-                  </a:tcPr>
-                </a:tc>
-                <a:tc>
-                  <a:txBody>
-                    <a:bodyPr/>
-                    <a:lstStyle/>
-                    <a:p>
-                      <a:pPr algn="ctr" indent="0" marL="0">
-                        <a:buNone/>
-                      </a:pPr>
-                      <a:r>
-                        <a:rPr lang="en-US" sz="1200" dirty="0">
-                          <a:solidFill>
-                            <a:srgbClr val="F2B90C"/>
-                          </a:solidFill>
-                          <a:latin typeface="Calibri" pitchFamily="34" charset="0"/>
-                          <a:ea typeface="Calibri" pitchFamily="34" charset="-122"/>
-                          <a:cs typeface="Calibri" pitchFamily="34" charset="-120"/>
-                        </a:rPr>
-                        <a:t>0.80</a:t>
-                      </a:r>
-                      <a:endParaRPr lang="en-US" sz="1200" dirty="0">
-                        <a:latin typeface="Calibri" charset="0"/>
-                        <a:ea typeface="Calibri" charset="0"/>
-                        <a:cs typeface="Calibri" charset="0"/>
-                      </a:endParaRPr>
-                    </a:p>
-                  </a:txBody>
-                  <a:tcPr marL="91440" marR="91440" marT="45720" marB="45720" anchor="ctr">
-                    <a:lnL w="6350" cap="flat" cmpd="sng" algn="ctr">
-                      <a:solidFill>
-                        <a:srgbClr val="2A323B"/>
-                      </a:solidFill>
-                      <a:prstDash val="solid"/>
-                      <a:round/>
-                      <a:headEnd type="none" w="med" len="med"/>
-                      <a:tailEnd type="none" w="med" len="med"/>
-                    </a:lnL>
-                    <a:lnR w="6350" cap="flat" cmpd="sng" algn="ctr">
-                      <a:solidFill>
-                        <a:srgbClr val="2A323B"/>
-                      </a:solidFill>
-                      <a:prstDash val="solid"/>
-                      <a:round/>
-                      <a:headEnd type="none" w="med" len="med"/>
-                      <a:tailEnd type="none" w="med" len="med"/>
-                    </a:lnR>
-                    <a:lnT w="6350" cap="flat" cmpd="sng" algn="ctr">
-                      <a:solidFill>
-                        <a:srgbClr val="2A323B"/>
-                      </a:solidFill>
-                      <a:prstDash val="solid"/>
-                      <a:round/>
-                      <a:headEnd type="none" w="med" len="med"/>
-                      <a:tailEnd type="none" w="med" len="med"/>
-                    </a:lnT>
-                    <a:lnB w="6350" cap="flat" cmpd="sng" algn="ctr">
-                      <a:solidFill>
-                        <a:srgbClr val="2A323B"/>
-                      </a:solidFill>
-                      <a:prstDash val="solid"/>
-                      <a:round/>
-                      <a:headEnd type="none" w="med" len="med"/>
-                      <a:tailEnd type="none" w="med" len="med"/>
-                    </a:lnB>
-                    <a:solidFill>
-                      <a:srgbClr val="1B2530"/>
                     </a:solidFill>
                   </a:tcPr>
                 </a:tc>

--- a/Beat-The-Hazard-Presentation.pptx
+++ b/Beat-The-Hazard-Presentation.pptx
@@ -2926,7 +2926,7 @@
                 <a:ea typeface="Consolas" pitchFamily="34" charset="-122"/>
                 <a:cs typeface="Consolas" pitchFamily="34" charset="-120"/>
               </a:rPr>
-              <a:t>204</a:t>
+              <a:t>255</a:t>
             </a:r>
             <a:endParaRPr lang="en-US" sz="2000" dirty="0"/>
           </a:p>
@@ -7191,7 +7191,7 @@
                 <a:ea typeface="Calibri" pitchFamily="34" charset="-122"/>
                 <a:cs typeface="Calibri" pitchFamily="34" charset="-120"/>
               </a:rPr>
-              <a:t>Zero third-party assets. No downloaded models, stock textures, sound files or web fonts — which means no licences to track and nothing to attribute. It also keeps the whole game to one 738 kB file.</a:t>
+              <a:t>Zero third-party assets. No downloaded models, stock textures, sound files or web fonts — which means no licences to track and nothing to attribute. It also keeps the whole game to one 822 kB file.</a:t>
             </a:r>
             <a:endParaRPr lang="en-US" sz="1300" dirty="0"/>
           </a:p>
@@ -8432,7 +8432,7 @@
                 <a:ea typeface="Consolas" pitchFamily="34" charset="-122"/>
                 <a:cs typeface="Consolas" pitchFamily="34" charset="-120"/>
               </a:rPr>
-              <a:t>204</a:t>
+              <a:t>255</a:t>
             </a:r>
             <a:endParaRPr lang="en-US" sz="2000" dirty="0"/>
           </a:p>
@@ -11935,7 +11935,7 @@
                 <a:ea typeface="Calibri" pitchFamily="34" charset="-122"/>
                 <a:cs typeface="Calibri" pitchFamily="34" charset="-120"/>
               </a:rPr>
-              <a:t>Also ships as one 738 kB file that runs offline.</a:t>
+              <a:t>Also ships as one 822 kB file that runs offline.</a:t>
             </a:r>
             <a:endParaRPr lang="en-US" sz="1150" dirty="0"/>
           </a:p>

--- a/Beat-The-Hazard-Presentation.pptx
+++ b/Beat-The-Hazard-Presentation.pptx
@@ -2926,7 +2926,7 @@
                 <a:ea typeface="Consolas" pitchFamily="34" charset="-122"/>
                 <a:cs typeface="Consolas" pitchFamily="34" charset="-120"/>
               </a:rPr>
-              <a:t>255</a:t>
+              <a:t>266</a:t>
             </a:r>
             <a:endParaRPr lang="en-US" sz="2000" dirty="0"/>
           </a:p>
@@ -7191,7 +7191,7 @@
                 <a:ea typeface="Calibri" pitchFamily="34" charset="-122"/>
                 <a:cs typeface="Calibri" pitchFamily="34" charset="-120"/>
               </a:rPr>
-              <a:t>Zero third-party assets. No downloaded models, stock textures, sound files or web fonts — which means no licences to track and nothing to attribute. It also keeps the whole game to one 822 kB file.</a:t>
+              <a:t>Zero third-party assets. No downloaded models, stock textures, sound files or web fonts — which means no licences to track and nothing to attribute. It also keeps the whole game to one 828 kB file.</a:t>
             </a:r>
             <a:endParaRPr lang="en-US" sz="1300" dirty="0"/>
           </a:p>
@@ -8432,7 +8432,7 @@
                 <a:ea typeface="Consolas" pitchFamily="34" charset="-122"/>
                 <a:cs typeface="Consolas" pitchFamily="34" charset="-120"/>
               </a:rPr>
-              <a:t>255</a:t>
+              <a:t>266</a:t>
             </a:r>
             <a:endParaRPr lang="en-US" sz="2000" dirty="0"/>
           </a:p>
@@ -11935,7 +11935,7 @@
                 <a:ea typeface="Calibri" pitchFamily="34" charset="-122"/>
                 <a:cs typeface="Calibri" pitchFamily="34" charset="-120"/>
               </a:rPr>
-              <a:t>Also ships as one 822 kB file that runs offline.</a:t>
+              <a:t>Also ships as one 828 kB file that runs offline.</a:t>
             </a:r>
             <a:endParaRPr lang="en-US" sz="1150" dirty="0"/>
           </a:p>

--- a/Beat-The-Hazard-Presentation.pptx
+++ b/Beat-The-Hazard-Presentation.pptx
@@ -2585,15 +2585,15 @@
               <a:buNone/>
             </a:pPr>
             <a:r>
-              <a:rPr lang="en-US" sz="1350" dirty="0">
-                <a:solidFill>
-                  <a:srgbClr val="97A4B2"/>
+              <a:rPr lang="en-US" sz="1350" b="1" dirty="0">
+                <a:solidFill>
+                  <a:srgbClr val="F2B90C"/>
                 </a:solidFill>
                 <a:latin typeface="Calibri" pitchFamily="34" charset="0"/>
                 <a:ea typeface="Calibri" pitchFamily="34" charset="-122"/>
                 <a:cs typeface="Calibri" pitchFamily="34" charset="-120"/>
               </a:rPr>
-              <a:t>Himalaya Logistics Distribution Centre  ·  Birgunj, Nepal</a:t>
+              <a:t>The Code Crafters</a:t>
             </a:r>
             <a:endParaRPr lang="en-US" sz="1350" dirty="0"/>
           </a:p>
@@ -3079,7 +3079,7 @@
                 <a:ea typeface="Calibri" pitchFamily="34" charset="-122"/>
                 <a:cs typeface="Calibri" pitchFamily="34" charset="-120"/>
               </a:rPr>
-              <a:t>Kushal Neupane</a:t>
+              <a:t>Built by Kushal Neupane</a:t>
             </a:r>
             <a:endParaRPr lang="en-US" sz="1250" dirty="0"/>
           </a:p>
@@ -11851,7 +11851,7 @@
                 <a:ea typeface="Calibri" pitchFamily="34" charset="-122"/>
                 <a:cs typeface="Calibri" pitchFamily="34" charset="-120"/>
               </a:rPr>
-              <a:t>Source, documentation and tests:</a:t>
+              <a:t>Download it, or install it as an app —</a:t>
             </a:r>
             <a:endParaRPr lang="en-US" sz="1150" dirty="0"/>
           </a:p>
@@ -11888,78 +11888,36 @@
               <a:rPr lang="en-US" sz="1200" b="1" dirty="0">
                 <a:solidFill>
                   <a:srgbClr val="38BDF8"/>
-                </a:solidFill>
-                <a:latin typeface="Consolas" pitchFamily="34" charset="0"/>
-                <a:ea typeface="Consolas" pitchFamily="34" charset="-122"/>
-                <a:cs typeface="Consolas" pitchFamily="34" charset="-120"/>
-              </a:rPr>
-              <a:t>github.com/kushalthewave/interprize-project</a:t>
-            </a:r>
-            <a:endParaRPr lang="en-US" sz="1200" dirty="0"/>
-          </a:p>
-        </p:txBody>
-      </p:sp>
-      <p:sp>
-        <p:nvSpPr>
-          <p:cNvPr id="26" name="Text 23"/>
-          <p:cNvSpPr txBox="1"/>
-          <p:nvPr/>
-        </p:nvSpPr>
-        <p:spPr>
-          <a:xfrm>
-            <a:off x="6858000" y="5212080"/>
-            <a:ext cx="4480560" cy="320040"/>
-          </a:xfrm>
-          <a:prstGeom prst="rect">
-            <a:avLst/>
-          </a:prstGeom>
-          <a:noFill/>
-          <a:ln/>
-        </p:spPr>
-        <p:txBody>
-          <a:bodyPr wrap="square" lIns="0" tIns="0" rIns="0" bIns="0" rtlCol="0" anchor="t"/>
-          <a:lstStyle/>
-          <a:p>
-            <a:pPr algn="l" indent="0" marL="0">
-              <a:lnSpc>
-                <a:spcPct val="120000"/>
-              </a:lnSpc>
-              <a:buNone/>
-            </a:pPr>
-            <a:r>
-              <a:rPr lang="en-US" sz="1150" i="1" dirty="0">
-                <a:solidFill>
-                  <a:srgbClr val="64717F"/>
                 </a:solidFill>
                 <a:latin typeface="Calibri" pitchFamily="34" charset="0"/>
                 <a:ea typeface="Calibri" pitchFamily="34" charset="-122"/>
                 <a:cs typeface="Calibri" pitchFamily="34" charset="-120"/>
               </a:rPr>
-              <a:t>Also ships as one 828 kB file that runs offline.</a:t>
-            </a:r>
-            <a:endParaRPr lang="en-US" sz="1150" dirty="0"/>
-          </a:p>
-        </p:txBody>
-      </p:sp>
-      <p:sp>
-        <p:nvSpPr>
-          <p:cNvPr id="27" name="Text 24"/>
-          <p:cNvSpPr txBox="1"/>
-          <p:nvPr/>
-        </p:nvSpPr>
-        <p:spPr>
-          <a:xfrm>
-            <a:off x="640080" y="6126480"/>
-            <a:ext cx="8229600" cy="320040"/>
-          </a:xfrm>
-          <a:prstGeom prst="rect">
-            <a:avLst/>
-          </a:prstGeom>
-          <a:noFill/>
-          <a:ln/>
-        </p:spPr>
-        <p:txBody>
-          <a:bodyPr wrap="square" lIns="0" tIns="0" rIns="0" bIns="0" rtlCol="0" anchor="ctr"/>
+              <a:t>both play with no internet.</a:t>
+            </a:r>
+            <a:endParaRPr lang="en-US" sz="1200" dirty="0"/>
+          </a:p>
+        </p:txBody>
+      </p:sp>
+      <p:sp>
+        <p:nvSpPr>
+          <p:cNvPr id="26" name="Text 23"/>
+          <p:cNvSpPr txBox="1"/>
+          <p:nvPr/>
+        </p:nvSpPr>
+        <p:spPr>
+          <a:xfrm>
+            <a:off x="6858000" y="5212080"/>
+            <a:ext cx="4480560" cy="320040"/>
+          </a:xfrm>
+          <a:prstGeom prst="rect">
+            <a:avLst/>
+          </a:prstGeom>
+          <a:noFill/>
+          <a:ln/>
+        </p:spPr>
+        <p:txBody>
+          <a:bodyPr wrap="square" lIns="0" tIns="0" rIns="0" bIns="0" rtlCol="0" anchor="t"/>
           <a:lstStyle/>
           <a:p>
             <a:pPr algn="l" indent="0" marL="0">
@@ -11969,15 +11927,57 @@
               <a:buNone/>
             </a:pPr>
             <a:r>
-              <a:rPr lang="en-US" sz="1200" b="1" dirty="0">
-                <a:solidFill>
-                  <a:srgbClr val="97A4B2"/>
+              <a:rPr lang="en-US" sz="1150" i="1" dirty="0">
+                <a:solidFill>
+                  <a:srgbClr val="64717F"/>
                 </a:solidFill>
                 <a:latin typeface="Calibri" pitchFamily="34" charset="0"/>
                 <a:ea typeface="Calibri" pitchFamily="34" charset="-122"/>
                 <a:cs typeface="Calibri" pitchFamily="34" charset="-120"/>
               </a:rPr>
-              <a:t>BEAT THE HAZARD   ·   Kushal Neupane</a:t>
+              <a:t>Also ships as one 828 kB file that runs offline.</a:t>
+            </a:r>
+            <a:endParaRPr lang="en-US" sz="1150" dirty="0"/>
+          </a:p>
+        </p:txBody>
+      </p:sp>
+      <p:sp>
+        <p:nvSpPr>
+          <p:cNvPr id="27" name="Text 24"/>
+          <p:cNvSpPr txBox="1"/>
+          <p:nvPr/>
+        </p:nvSpPr>
+        <p:spPr>
+          <a:xfrm>
+            <a:off x="640080" y="6126480"/>
+            <a:ext cx="8229600" cy="320040"/>
+          </a:xfrm>
+          <a:prstGeom prst="rect">
+            <a:avLst/>
+          </a:prstGeom>
+          <a:noFill/>
+          <a:ln/>
+        </p:spPr>
+        <p:txBody>
+          <a:bodyPr wrap="square" lIns="0" tIns="0" rIns="0" bIns="0" rtlCol="0" anchor="ctr"/>
+          <a:lstStyle/>
+          <a:p>
+            <a:pPr algn="l" indent="0" marL="0">
+              <a:lnSpc>
+                <a:spcPct val="120000"/>
+              </a:lnSpc>
+              <a:buNone/>
+            </a:pPr>
+            <a:r>
+              <a:rPr lang="en-US" sz="1200" b="1" dirty="0">
+                <a:solidFill>
+                  <a:srgbClr val="97A4B2"/>
+                </a:solidFill>
+                <a:latin typeface="Calibri" pitchFamily="34" charset="0"/>
+                <a:ea typeface="Calibri" pitchFamily="34" charset="-122"/>
+                <a:cs typeface="Calibri" pitchFamily="34" charset="-120"/>
+              </a:rPr>
+              <a:t>BEAT THE HAZARD   ·   The Code Crafters   ·   Built by Kushal Neupane</a:t>
             </a:r>
             <a:endParaRPr lang="en-US" sz="1200" dirty="0"/>
           </a:p>
